--- a/tex/ethicsreview/ethics_review_visibility/別紙4実験の様子.pptx
+++ b/tex/ethicsreview/ethics_review_visibility/別紙4実験の様子.pptx
@@ -259,7 +259,7 @@
           <a:p>
             <a:fld id="{B8DF1395-FA99-4447-94F8-1375B56893CE}" type="datetimeFigureOut">
               <a:rPr kumimoji="1" lang="ja-JP" altLang="en-US" smtClean="0"/>
-              <a:t>2026/6/15</a:t>
+              <a:t>2026/7/2</a:t>
             </a:fld>
             <a:endParaRPr kumimoji="1" lang="ja-JP" altLang="en-US"/>
           </a:p>
@@ -489,7 +489,7 @@
           <a:p>
             <a:fld id="{B8DF1395-FA99-4447-94F8-1375B56893CE}" type="datetimeFigureOut">
               <a:rPr kumimoji="1" lang="ja-JP" altLang="en-US" smtClean="0"/>
-              <a:t>2026/6/15</a:t>
+              <a:t>2026/7/2</a:t>
             </a:fld>
             <a:endParaRPr kumimoji="1" lang="ja-JP" altLang="en-US"/>
           </a:p>
@@ -729,7 +729,7 @@
           <a:p>
             <a:fld id="{B8DF1395-FA99-4447-94F8-1375B56893CE}" type="datetimeFigureOut">
               <a:rPr kumimoji="1" lang="ja-JP" altLang="en-US" smtClean="0"/>
-              <a:t>2026/6/15</a:t>
+              <a:t>2026/7/2</a:t>
             </a:fld>
             <a:endParaRPr kumimoji="1" lang="ja-JP" altLang="en-US"/>
           </a:p>
@@ -959,7 +959,7 @@
           <a:p>
             <a:fld id="{B8DF1395-FA99-4447-94F8-1375B56893CE}" type="datetimeFigureOut">
               <a:rPr kumimoji="1" lang="ja-JP" altLang="en-US" smtClean="0"/>
-              <a:t>2026/6/15</a:t>
+              <a:t>2026/7/2</a:t>
             </a:fld>
             <a:endParaRPr kumimoji="1" lang="ja-JP" altLang="en-US"/>
           </a:p>
@@ -1234,7 +1234,7 @@
           <a:p>
             <a:fld id="{B8DF1395-FA99-4447-94F8-1375B56893CE}" type="datetimeFigureOut">
               <a:rPr kumimoji="1" lang="ja-JP" altLang="en-US" smtClean="0"/>
-              <a:t>2026/6/15</a:t>
+              <a:t>2026/7/2</a:t>
             </a:fld>
             <a:endParaRPr kumimoji="1" lang="ja-JP" altLang="en-US"/>
           </a:p>
@@ -1563,7 +1563,7 @@
           <a:p>
             <a:fld id="{B8DF1395-FA99-4447-94F8-1375B56893CE}" type="datetimeFigureOut">
               <a:rPr kumimoji="1" lang="ja-JP" altLang="en-US" smtClean="0"/>
-              <a:t>2026/6/15</a:t>
+              <a:t>2026/7/2</a:t>
             </a:fld>
             <a:endParaRPr kumimoji="1" lang="ja-JP" altLang="en-US"/>
           </a:p>
@@ -2039,7 +2039,7 @@
           <a:p>
             <a:fld id="{B8DF1395-FA99-4447-94F8-1375B56893CE}" type="datetimeFigureOut">
               <a:rPr kumimoji="1" lang="ja-JP" altLang="en-US" smtClean="0"/>
-              <a:t>2026/6/15</a:t>
+              <a:t>2026/7/2</a:t>
             </a:fld>
             <a:endParaRPr kumimoji="1" lang="ja-JP" altLang="en-US"/>
           </a:p>
@@ -2180,7 +2180,7 @@
           <a:p>
             <a:fld id="{B8DF1395-FA99-4447-94F8-1375B56893CE}" type="datetimeFigureOut">
               <a:rPr kumimoji="1" lang="ja-JP" altLang="en-US" smtClean="0"/>
-              <a:t>2026/6/15</a:t>
+              <a:t>2026/7/2</a:t>
             </a:fld>
             <a:endParaRPr kumimoji="1" lang="ja-JP" altLang="en-US"/>
           </a:p>
@@ -2293,7 +2293,7 @@
           <a:p>
             <a:fld id="{B8DF1395-FA99-4447-94F8-1375B56893CE}" type="datetimeFigureOut">
               <a:rPr kumimoji="1" lang="ja-JP" altLang="en-US" smtClean="0"/>
-              <a:t>2026/6/15</a:t>
+              <a:t>2026/7/2</a:t>
             </a:fld>
             <a:endParaRPr kumimoji="1" lang="ja-JP" altLang="en-US"/>
           </a:p>
@@ -2636,7 +2636,7 @@
           <a:p>
             <a:fld id="{B8DF1395-FA99-4447-94F8-1375B56893CE}" type="datetimeFigureOut">
               <a:rPr kumimoji="1" lang="ja-JP" altLang="en-US" smtClean="0"/>
-              <a:t>2026/6/15</a:t>
+              <a:t>2026/7/2</a:t>
             </a:fld>
             <a:endParaRPr kumimoji="1" lang="ja-JP" altLang="en-US"/>
           </a:p>
@@ -2924,7 +2924,7 @@
           <a:p>
             <a:fld id="{B8DF1395-FA99-4447-94F8-1375B56893CE}" type="datetimeFigureOut">
               <a:rPr kumimoji="1" lang="ja-JP" altLang="en-US" smtClean="0"/>
-              <a:t>2026/6/15</a:t>
+              <a:t>2026/7/2</a:t>
             </a:fld>
             <a:endParaRPr kumimoji="1" lang="ja-JP" altLang="en-US"/>
           </a:p>
@@ -3197,7 +3197,7 @@
           <a:p>
             <a:fld id="{B8DF1395-FA99-4447-94F8-1375B56893CE}" type="datetimeFigureOut">
               <a:rPr kumimoji="1" lang="ja-JP" altLang="en-US" smtClean="0"/>
-              <a:t>2026/6/15</a:t>
+              <a:t>2026/7/2</a:t>
             </a:fld>
             <a:endParaRPr kumimoji="1" lang="ja-JP" altLang="en-US"/>
           </a:p>
@@ -3638,246 +3638,511 @@
               <a:t>別紙</a:t>
             </a:r>
             <a:r>
-              <a:rPr kumimoji="1" lang="en-US" altLang="ja-JP"/>
-              <a:t>3)</a:t>
+              <a:rPr kumimoji="1" lang="en-US" altLang="ja-JP" dirty="0"/>
+              <a:t>4)</a:t>
             </a:r>
             <a:r>
               <a:rPr kumimoji="1" lang="ja-JP" altLang="en-US" dirty="0"/>
-              <a:t>研究体制図</a:t>
-            </a:r>
-          </a:p>
-        </p:txBody>
-      </p:sp>
-      <p:sp>
-        <p:nvSpPr>
-          <p:cNvPr id="4" name="正方形/長方形 3"/>
-          <p:cNvSpPr/>
+              <a:t>実験の様子</a:t>
+            </a:r>
+          </a:p>
+        </p:txBody>
+      </p:sp>
+      <p:grpSp>
+        <p:nvGrpSpPr>
+          <p:cNvPr id="3" name="グループ化 2">
+            <a:extLst>
+              <a:ext uri="{FF2B5EF4-FFF2-40B4-BE49-F238E27FC236}">
+                <a16:creationId xmlns:a16="http://schemas.microsoft.com/office/drawing/2014/main" id="{C065E954-8D13-1807-3944-85C19F4143A4}"/>
+              </a:ext>
+            </a:extLst>
+          </p:cNvPr>
+          <p:cNvGrpSpPr/>
+          <p:nvPr/>
+        </p:nvGrpSpPr>
+        <p:grpSpPr>
+          <a:xfrm>
+            <a:off x="1050244" y="1996773"/>
+            <a:ext cx="4457927" cy="3548086"/>
+            <a:chOff x="4141787" y="1147687"/>
+            <a:chExt cx="4073491" cy="3548086"/>
+          </a:xfrm>
+        </p:grpSpPr>
+        <p:pic>
+          <p:nvPicPr>
+            <p:cNvPr id="7" name="図 6">
+              <a:extLst>
+                <a:ext uri="{FF2B5EF4-FFF2-40B4-BE49-F238E27FC236}">
+                  <a16:creationId xmlns:a16="http://schemas.microsoft.com/office/drawing/2014/main" id="{5A802460-0424-3158-8AFE-514EE9E52A2D}"/>
+                </a:ext>
+              </a:extLst>
+            </p:cNvPr>
+            <p:cNvPicPr>
+              <a:picLocks noChangeAspect="1"/>
+            </p:cNvPicPr>
+            <p:nvPr/>
+          </p:nvPicPr>
+          <p:blipFill>
+            <a:blip r:embed="rId2"/>
+            <a:stretch>
+              <a:fillRect/>
+            </a:stretch>
+          </p:blipFill>
+          <p:spPr>
+            <a:xfrm>
+              <a:off x="4301560" y="1801243"/>
+              <a:ext cx="3913718" cy="2528101"/>
+            </a:xfrm>
+            <a:prstGeom prst="rect">
+              <a:avLst/>
+            </a:prstGeom>
+          </p:spPr>
+        </p:pic>
+        <p:sp>
+          <p:nvSpPr>
+            <p:cNvPr id="8" name="テキスト ボックス 7">
+              <a:extLst>
+                <a:ext uri="{FF2B5EF4-FFF2-40B4-BE49-F238E27FC236}">
+                  <a16:creationId xmlns:a16="http://schemas.microsoft.com/office/drawing/2014/main" id="{2BB17F46-795E-32AD-476A-BA4FEBC56BA0}"/>
+                </a:ext>
+              </a:extLst>
+            </p:cNvPr>
+            <p:cNvSpPr txBox="1"/>
+            <p:nvPr/>
+          </p:nvSpPr>
+          <p:spPr>
+            <a:xfrm>
+              <a:off x="6782655" y="1147687"/>
+              <a:ext cx="1415618" cy="646331"/>
+            </a:xfrm>
+            <a:prstGeom prst="rect">
+              <a:avLst/>
+            </a:prstGeom>
+            <a:noFill/>
+          </p:spPr>
+          <p:txBody>
+            <a:bodyPr wrap="square" rtlCol="0">
+              <a:spAutoFit/>
+            </a:bodyPr>
+            <a:lstStyle/>
+            <a:p>
+              <a:pPr algn="ctr"/>
+              <a:r>
+                <a:rPr kumimoji="1" lang="en-US" altLang="ja-JP" dirty="0"/>
+                <a:t>Background</a:t>
+              </a:r>
+            </a:p>
+            <a:p>
+              <a:pPr algn="ctr"/>
+              <a:r>
+                <a:rPr kumimoji="1" lang="en-US" altLang="ja-JP" dirty="0"/>
+                <a:t> LCD display</a:t>
+              </a:r>
+              <a:endParaRPr kumimoji="1" lang="ja-JP" altLang="en-US" dirty="0"/>
+            </a:p>
+          </p:txBody>
+        </p:sp>
+        <p:sp>
+          <p:nvSpPr>
+            <p:cNvPr id="9" name="テキスト ボックス 8">
+              <a:extLst>
+                <a:ext uri="{FF2B5EF4-FFF2-40B4-BE49-F238E27FC236}">
+                  <a16:creationId xmlns:a16="http://schemas.microsoft.com/office/drawing/2014/main" id="{A400FA13-C514-69AE-4CC1-C9688AD8A84C}"/>
+                </a:ext>
+              </a:extLst>
+            </p:cNvPr>
+            <p:cNvSpPr txBox="1"/>
+            <p:nvPr/>
+          </p:nvSpPr>
+          <p:spPr>
+            <a:xfrm>
+              <a:off x="4644000" y="4326441"/>
+              <a:ext cx="2960975" cy="369332"/>
+            </a:xfrm>
+            <a:prstGeom prst="rect">
+              <a:avLst/>
+            </a:prstGeom>
+            <a:noFill/>
+          </p:spPr>
+          <p:txBody>
+            <a:bodyPr wrap="square" rtlCol="0">
+              <a:spAutoFit/>
+            </a:bodyPr>
+            <a:lstStyle/>
+            <a:p>
+              <a:pPr algn="ctr"/>
+              <a:r>
+                <a:rPr kumimoji="1" lang="en-US" altLang="ja-JP" dirty="0"/>
+                <a:t>Foreground LCD display</a:t>
+              </a:r>
+              <a:endParaRPr kumimoji="1" lang="ja-JP" altLang="en-US" dirty="0"/>
+            </a:p>
+          </p:txBody>
+        </p:sp>
+        <p:cxnSp>
+          <p:nvCxnSpPr>
+            <p:cNvPr id="10" name="直線コネクタ 9">
+              <a:extLst>
+                <a:ext uri="{FF2B5EF4-FFF2-40B4-BE49-F238E27FC236}">
+                  <a16:creationId xmlns:a16="http://schemas.microsoft.com/office/drawing/2014/main" id="{A7D74A30-68FF-D9C1-E823-8B685FC0473E}"/>
+                </a:ext>
+              </a:extLst>
+            </p:cNvPr>
+            <p:cNvCxnSpPr>
+              <a:cxnSpLocks/>
+              <a:stCxn id="7" idx="0"/>
+            </p:cNvCxnSpPr>
+            <p:nvPr/>
+          </p:nvCxnSpPr>
+          <p:spPr>
+            <a:xfrm flipH="1">
+              <a:off x="5868000" y="1801243"/>
+              <a:ext cx="390419" cy="1071330"/>
+            </a:xfrm>
+            <a:prstGeom prst="line">
+              <a:avLst/>
+            </a:prstGeom>
+            <a:ln/>
+          </p:spPr>
+          <p:style>
+            <a:lnRef idx="3">
+              <a:schemeClr val="accent2"/>
+            </a:lnRef>
+            <a:fillRef idx="0">
+              <a:schemeClr val="accent2"/>
+            </a:fillRef>
+            <a:effectRef idx="2">
+              <a:schemeClr val="accent2"/>
+            </a:effectRef>
+            <a:fontRef idx="minor">
+              <a:schemeClr val="tx1"/>
+            </a:fontRef>
+          </p:style>
+        </p:cxnSp>
+        <p:sp>
+          <p:nvSpPr>
+            <p:cNvPr id="11" name="テキスト ボックス 10">
+              <a:extLst>
+                <a:ext uri="{FF2B5EF4-FFF2-40B4-BE49-F238E27FC236}">
+                  <a16:creationId xmlns:a16="http://schemas.microsoft.com/office/drawing/2014/main" id="{235398D0-75A4-0784-B9A7-4F085A58C90D}"/>
+                </a:ext>
+              </a:extLst>
+            </p:cNvPr>
+            <p:cNvSpPr txBox="1"/>
+            <p:nvPr/>
+          </p:nvSpPr>
+          <p:spPr>
+            <a:xfrm>
+              <a:off x="5808729" y="1154912"/>
+              <a:ext cx="899379" cy="646331"/>
+            </a:xfrm>
+            <a:prstGeom prst="rect">
+              <a:avLst/>
+            </a:prstGeom>
+            <a:noFill/>
+          </p:spPr>
+          <p:txBody>
+            <a:bodyPr wrap="square" rtlCol="0">
+              <a:spAutoFit/>
+            </a:bodyPr>
+            <a:lstStyle/>
+            <a:p>
+              <a:r>
+                <a:rPr kumimoji="1" lang="en-US" altLang="ja-JP" dirty="0"/>
+                <a:t>Beam </a:t>
+              </a:r>
+            </a:p>
+            <a:p>
+              <a:r>
+                <a:rPr kumimoji="1" lang="en-US" altLang="ja-JP" dirty="0"/>
+                <a:t>splitter</a:t>
+              </a:r>
+              <a:endParaRPr kumimoji="1" lang="ja-JP" altLang="en-US" dirty="0"/>
+            </a:p>
+          </p:txBody>
+        </p:sp>
+        <p:sp>
+          <p:nvSpPr>
+            <p:cNvPr id="12" name="テキスト ボックス 11">
+              <a:extLst>
+                <a:ext uri="{FF2B5EF4-FFF2-40B4-BE49-F238E27FC236}">
+                  <a16:creationId xmlns:a16="http://schemas.microsoft.com/office/drawing/2014/main" id="{AB2ADD6D-7E2C-FD5E-42E3-F8FC6FF17CEA}"/>
+                </a:ext>
+              </a:extLst>
+            </p:cNvPr>
+            <p:cNvSpPr txBox="1"/>
+            <p:nvPr/>
+          </p:nvSpPr>
+          <p:spPr>
+            <a:xfrm>
+              <a:off x="4141787" y="1147687"/>
+              <a:ext cx="1326100" cy="646331"/>
+            </a:xfrm>
+            <a:prstGeom prst="rect">
+              <a:avLst/>
+            </a:prstGeom>
+            <a:noFill/>
+          </p:spPr>
+          <p:txBody>
+            <a:bodyPr wrap="square" rtlCol="0">
+              <a:spAutoFit/>
+            </a:bodyPr>
+            <a:lstStyle/>
+            <a:p>
+              <a:pPr algn="ctr"/>
+              <a:r>
+                <a:rPr kumimoji="1" lang="en-US" altLang="ja-JP" dirty="0"/>
+                <a:t>Forehead </a:t>
+              </a:r>
+            </a:p>
+            <a:p>
+              <a:pPr algn="ctr"/>
+              <a:r>
+                <a:rPr kumimoji="1" lang="en-US" altLang="ja-JP" dirty="0"/>
+                <a:t>Support</a:t>
+              </a:r>
+              <a:endParaRPr kumimoji="1" lang="ja-JP" altLang="en-US" dirty="0"/>
+            </a:p>
+          </p:txBody>
+        </p:sp>
+        <p:cxnSp>
+          <p:nvCxnSpPr>
+            <p:cNvPr id="13" name="直線コネクタ 12">
+              <a:extLst>
+                <a:ext uri="{FF2B5EF4-FFF2-40B4-BE49-F238E27FC236}">
+                  <a16:creationId xmlns:a16="http://schemas.microsoft.com/office/drawing/2014/main" id="{70B81004-F97F-13B9-9F6F-555E9D8F2382}"/>
+                </a:ext>
+              </a:extLst>
+            </p:cNvPr>
+            <p:cNvCxnSpPr>
+              <a:cxnSpLocks/>
+              <a:stCxn id="8" idx="2"/>
+            </p:cNvCxnSpPr>
+            <p:nvPr/>
+          </p:nvCxnSpPr>
+          <p:spPr>
+            <a:xfrm>
+              <a:off x="7490464" y="1794018"/>
+              <a:ext cx="0" cy="554153"/>
+            </a:xfrm>
+            <a:prstGeom prst="line">
+              <a:avLst/>
+            </a:prstGeom>
+            <a:ln/>
+          </p:spPr>
+          <p:style>
+            <a:lnRef idx="3">
+              <a:schemeClr val="accent2"/>
+            </a:lnRef>
+            <a:fillRef idx="0">
+              <a:schemeClr val="accent2"/>
+            </a:fillRef>
+            <a:effectRef idx="2">
+              <a:schemeClr val="accent2"/>
+            </a:effectRef>
+            <a:fontRef idx="minor">
+              <a:schemeClr val="tx1"/>
+            </a:fontRef>
+          </p:style>
+        </p:cxnSp>
+        <p:cxnSp>
+          <p:nvCxnSpPr>
+            <p:cNvPr id="14" name="直線コネクタ 13">
+              <a:extLst>
+                <a:ext uri="{FF2B5EF4-FFF2-40B4-BE49-F238E27FC236}">
+                  <a16:creationId xmlns:a16="http://schemas.microsoft.com/office/drawing/2014/main" id="{4C26004F-C589-004D-4104-A1F8E6930B8F}"/>
+                </a:ext>
+              </a:extLst>
+            </p:cNvPr>
+            <p:cNvCxnSpPr>
+              <a:cxnSpLocks/>
+            </p:cNvCxnSpPr>
+            <p:nvPr/>
+          </p:nvCxnSpPr>
+          <p:spPr>
+            <a:xfrm>
+              <a:off x="5868000" y="3419501"/>
+              <a:ext cx="0" cy="961730"/>
+            </a:xfrm>
+            <a:prstGeom prst="line">
+              <a:avLst/>
+            </a:prstGeom>
+            <a:ln/>
+          </p:spPr>
+          <p:style>
+            <a:lnRef idx="3">
+              <a:schemeClr val="accent2"/>
+            </a:lnRef>
+            <a:fillRef idx="0">
+              <a:schemeClr val="accent2"/>
+            </a:fillRef>
+            <a:effectRef idx="2">
+              <a:schemeClr val="accent2"/>
+            </a:effectRef>
+            <a:fontRef idx="minor">
+              <a:schemeClr val="tx1"/>
+            </a:fontRef>
+          </p:style>
+        </p:cxnSp>
+        <p:cxnSp>
+          <p:nvCxnSpPr>
+            <p:cNvPr id="15" name="直線コネクタ 14">
+              <a:extLst>
+                <a:ext uri="{FF2B5EF4-FFF2-40B4-BE49-F238E27FC236}">
+                  <a16:creationId xmlns:a16="http://schemas.microsoft.com/office/drawing/2014/main" id="{E9F085F9-6436-A7E7-8CDE-9768F53934F0}"/>
+                </a:ext>
+              </a:extLst>
+            </p:cNvPr>
+            <p:cNvCxnSpPr>
+              <a:cxnSpLocks/>
+            </p:cNvCxnSpPr>
+            <p:nvPr/>
+          </p:nvCxnSpPr>
+          <p:spPr>
+            <a:xfrm>
+              <a:off x="4638738" y="1756521"/>
+              <a:ext cx="0" cy="527229"/>
+            </a:xfrm>
+            <a:prstGeom prst="line">
+              <a:avLst/>
+            </a:prstGeom>
+            <a:ln/>
+          </p:spPr>
+          <p:style>
+            <a:lnRef idx="3">
+              <a:schemeClr val="accent2"/>
+            </a:lnRef>
+            <a:fillRef idx="0">
+              <a:schemeClr val="accent2"/>
+            </a:fillRef>
+            <a:effectRef idx="2">
+              <a:schemeClr val="accent2"/>
+            </a:effectRef>
+            <a:fontRef idx="minor">
+              <a:schemeClr val="tx1"/>
+            </a:fontRef>
+          </p:style>
+        </p:cxnSp>
+      </p:grpSp>
+      <p:sp>
+        <p:nvSpPr>
+          <p:cNvPr id="16" name="テキスト ボックス 15">
+            <a:extLst>
+              <a:ext uri="{FF2B5EF4-FFF2-40B4-BE49-F238E27FC236}">
+                <a16:creationId xmlns:a16="http://schemas.microsoft.com/office/drawing/2014/main" id="{D2154600-B7A3-ED96-5729-9588B3FBD605}"/>
+              </a:ext>
+            </a:extLst>
+          </p:cNvPr>
+          <p:cNvSpPr txBox="1"/>
           <p:nvPr/>
         </p:nvSpPr>
         <p:spPr>
           <a:xfrm>
-            <a:off x="1138843" y="2793075"/>
-            <a:ext cx="3050771" cy="1886989"/>
+            <a:off x="2305276" y="5764350"/>
+            <a:ext cx="2122714" cy="369332"/>
           </a:xfrm>
           <a:prstGeom prst="rect">
             <a:avLst/>
           </a:prstGeom>
-          <a:solidFill>
-            <a:schemeClr val="bg1"/>
-          </a:solidFill>
+          <a:noFill/>
         </p:spPr>
-        <p:style>
-          <a:lnRef idx="2">
-            <a:schemeClr val="accent1">
-              <a:shade val="50000"/>
-            </a:schemeClr>
-          </a:lnRef>
-          <a:fillRef idx="1">
-            <a:schemeClr val="accent1"/>
-          </a:fillRef>
-          <a:effectRef idx="0">
-            <a:schemeClr val="accent1"/>
-          </a:effectRef>
-          <a:fontRef idx="minor">
-            <a:schemeClr val="lt1"/>
-          </a:fontRef>
-        </p:style>
-        <p:txBody>
-          <a:bodyPr rtlCol="0" anchor="ctr"/>
-          <a:lstStyle/>
-          <a:p>
-            <a:pPr algn="ctr"/>
-            <a:r>
-              <a:rPr kumimoji="1" lang="ja-JP" altLang="en-US" dirty="0">
-                <a:solidFill>
-                  <a:schemeClr val="tx1"/>
-                </a:solidFill>
-              </a:rPr>
-              <a:t>東京大学</a:t>
-            </a:r>
-            <a:r>
-              <a:rPr lang="ja-JP" altLang="en-US" dirty="0">
-                <a:solidFill>
-                  <a:schemeClr val="tx1"/>
-                </a:solidFill>
-              </a:rPr>
-              <a:t>生産技術研究所</a:t>
-            </a:r>
-            <a:endParaRPr lang="en-US" altLang="ja-JP" dirty="0">
-              <a:solidFill>
-                <a:schemeClr val="tx1"/>
-              </a:solidFill>
-            </a:endParaRPr>
-          </a:p>
-          <a:p>
-            <a:pPr algn="ctr"/>
-            <a:r>
-              <a:rPr kumimoji="1" lang="ja-JP" altLang="en-US" dirty="0">
-                <a:solidFill>
-                  <a:schemeClr val="tx1"/>
-                </a:solidFill>
-              </a:rPr>
-              <a:t>大石研究室</a:t>
-            </a:r>
-            <a:endParaRPr kumimoji="1" lang="en-US" altLang="ja-JP" dirty="0">
-              <a:solidFill>
-                <a:schemeClr val="tx1"/>
-              </a:solidFill>
-            </a:endParaRPr>
-          </a:p>
-          <a:p>
-            <a:pPr algn="ctr"/>
-            <a:endParaRPr lang="en-US" altLang="ja-JP" dirty="0">
-              <a:solidFill>
-                <a:schemeClr val="tx1"/>
-              </a:solidFill>
-            </a:endParaRPr>
-          </a:p>
-          <a:p>
-            <a:pPr algn="ctr"/>
-            <a:r>
-              <a:rPr kumimoji="1" lang="ja-JP" altLang="en-US" dirty="0">
-                <a:solidFill>
-                  <a:schemeClr val="tx1"/>
-                </a:solidFill>
-              </a:rPr>
-              <a:t>評価実験、データ解析</a:t>
-            </a:r>
-            <a:endParaRPr kumimoji="1" lang="en-US" altLang="ja-JP" dirty="0">
-              <a:solidFill>
-                <a:schemeClr val="tx1"/>
-              </a:solidFill>
-            </a:endParaRPr>
-          </a:p>
-        </p:txBody>
-      </p:sp>
-      <p:sp>
-        <p:nvSpPr>
-          <p:cNvPr id="5" name="右矢印 4"/>
-          <p:cNvSpPr/>
+        <p:txBody>
+          <a:bodyPr wrap="square" rtlCol="0">
+            <a:spAutoFit/>
+          </a:bodyPr>
+          <a:lstStyle/>
+          <a:p>
+            <a:r>
+              <a:rPr lang="en-US" altLang="ja-JP" dirty="0"/>
+              <a:t>Fig</a:t>
+            </a:r>
+            <a:r>
+              <a:rPr kumimoji="1" lang="en-US" altLang="ja-JP" dirty="0"/>
+              <a:t>1. </a:t>
+            </a:r>
+            <a:r>
+              <a:rPr kumimoji="1" lang="ja-JP" altLang="en-US" dirty="0"/>
+              <a:t>実験装置</a:t>
+            </a:r>
+          </a:p>
+        </p:txBody>
+      </p:sp>
+      <p:pic>
+        <p:nvPicPr>
+          <p:cNvPr id="18" name="図 17">
+            <a:extLst>
+              <a:ext uri="{FF2B5EF4-FFF2-40B4-BE49-F238E27FC236}">
+                <a16:creationId xmlns:a16="http://schemas.microsoft.com/office/drawing/2014/main" id="{91CDCF29-8BD2-50D4-7746-EB0D5416EA61}"/>
+              </a:ext>
+            </a:extLst>
+          </p:cNvPr>
+          <p:cNvPicPr>
+            <a:picLocks noChangeAspect="1"/>
+          </p:cNvPicPr>
           <p:nvPr/>
-        </p:nvSpPr>
+        </p:nvPicPr>
+        <p:blipFill>
+          <a:blip r:embed="rId3">
+            <a:extLst>
+              <a:ext uri="{28A0092B-C50C-407E-A947-70E740481C1C}">
+                <a14:useLocalDpi xmlns:a14="http://schemas.microsoft.com/office/drawing/2010/main" val="0"/>
+              </a:ext>
+            </a:extLst>
+          </a:blip>
+          <a:stretch>
+            <a:fillRect/>
+          </a:stretch>
+        </p:blipFill>
         <p:spPr>
           <a:xfrm>
-            <a:off x="4490257" y="2427316"/>
-            <a:ext cx="3391592" cy="2618509"/>
-          </a:xfrm>
-          <a:prstGeom prst="rightArrow">
-            <a:avLst/>
-          </a:prstGeom>
-          <a:solidFill>
-            <a:schemeClr val="tx2"/>
-          </a:solidFill>
-          <a:ln>
-            <a:solidFill>
-              <a:schemeClr val="tx2"/>
-            </a:solidFill>
-          </a:ln>
-        </p:spPr>
-        <p:style>
-          <a:lnRef idx="2">
-            <a:schemeClr val="accent1">
-              <a:shade val="50000"/>
-            </a:schemeClr>
-          </a:lnRef>
-          <a:fillRef idx="1">
-            <a:schemeClr val="accent1"/>
-          </a:fillRef>
-          <a:effectRef idx="0">
-            <a:schemeClr val="accent1"/>
-          </a:effectRef>
-          <a:fontRef idx="minor">
-            <a:schemeClr val="lt1"/>
-          </a:fontRef>
-        </p:style>
-        <p:txBody>
-          <a:bodyPr rtlCol="0" anchor="ctr"/>
-          <a:lstStyle/>
-          <a:p>
-            <a:pPr algn="ctr"/>
-            <a:r>
-              <a:rPr lang="ja-JP" altLang="ja-JP" dirty="0"/>
-              <a:t>個々の結果が分からないようにした全体の</a:t>
-            </a:r>
-            <a:br>
-              <a:rPr lang="en-US" altLang="ja-JP" dirty="0"/>
-            </a:br>
-            <a:r>
-              <a:rPr lang="ja-JP" altLang="ja-JP" dirty="0"/>
-              <a:t>解析結果のみを共有する</a:t>
-            </a:r>
-            <a:endParaRPr kumimoji="1" lang="ja-JP" altLang="en-US" dirty="0"/>
-          </a:p>
-        </p:txBody>
-      </p:sp>
-      <p:sp>
-        <p:nvSpPr>
-          <p:cNvPr id="6" name="正方形/長方形 5"/>
-          <p:cNvSpPr/>
-          <p:nvPr/>
-        </p:nvSpPr>
-        <p:spPr>
-          <a:xfrm>
-            <a:off x="8115990" y="2793075"/>
-            <a:ext cx="3050771" cy="1886989"/>
+            <a:off x="6856491" y="2651780"/>
+            <a:ext cx="3366930" cy="2525198"/>
           </a:xfrm>
           <a:prstGeom prst="rect">
             <a:avLst/>
           </a:prstGeom>
-          <a:solidFill>
-            <a:schemeClr val="bg1"/>
-          </a:solidFill>
         </p:spPr>
-        <p:style>
-          <a:lnRef idx="2">
-            <a:schemeClr val="accent1">
-              <a:shade val="50000"/>
-            </a:schemeClr>
-          </a:lnRef>
-          <a:fillRef idx="1">
-            <a:schemeClr val="accent1"/>
-          </a:fillRef>
-          <a:effectRef idx="0">
-            <a:schemeClr val="accent1"/>
-          </a:effectRef>
-          <a:fontRef idx="minor">
-            <a:schemeClr val="lt1"/>
-          </a:fontRef>
-        </p:style>
-        <p:txBody>
-          <a:bodyPr rtlCol="0" anchor="ctr"/>
-          <a:lstStyle/>
-          <a:p>
-            <a:pPr algn="ctr"/>
-            <a:r>
-              <a:rPr lang="ja-JP" altLang="en-US" dirty="0">
-                <a:solidFill>
-                  <a:schemeClr val="tx1"/>
-                </a:solidFill>
-              </a:rPr>
-              <a:t>吹上 大樹</a:t>
-            </a:r>
-            <a:endParaRPr lang="en-US" altLang="ja-JP" dirty="0">
-              <a:solidFill>
-                <a:schemeClr val="tx1"/>
-              </a:solidFill>
-            </a:endParaRPr>
-          </a:p>
-          <a:p>
-            <a:pPr algn="ctr"/>
-            <a:r>
-              <a:rPr kumimoji="1" lang="ja-JP" altLang="en-US" dirty="0">
-                <a:solidFill>
-                  <a:schemeClr val="tx1"/>
-                </a:solidFill>
-              </a:rPr>
-              <a:t>解析結果の確認</a:t>
-            </a:r>
-            <a:endParaRPr kumimoji="1" lang="en-US" altLang="ja-JP" dirty="0">
-              <a:solidFill>
-                <a:schemeClr val="tx1"/>
-              </a:solidFill>
-            </a:endParaRPr>
+      </p:pic>
+      <p:sp>
+        <p:nvSpPr>
+          <p:cNvPr id="20" name="テキスト ボックス 19">
+            <a:extLst>
+              <a:ext uri="{FF2B5EF4-FFF2-40B4-BE49-F238E27FC236}">
+                <a16:creationId xmlns:a16="http://schemas.microsoft.com/office/drawing/2014/main" id="{4C0F96E7-59B4-ACAF-61C5-020FBE584705}"/>
+              </a:ext>
+            </a:extLst>
+          </p:cNvPr>
+          <p:cNvSpPr txBox="1"/>
+          <p:nvPr/>
+        </p:nvSpPr>
+        <p:spPr>
+          <a:xfrm>
+            <a:off x="6612429" y="5625850"/>
+            <a:ext cx="4050995" cy="646331"/>
+          </a:xfrm>
+          <a:prstGeom prst="rect">
+            <a:avLst/>
+          </a:prstGeom>
+          <a:noFill/>
+        </p:spPr>
+        <p:txBody>
+          <a:bodyPr wrap="square" rtlCol="0">
+            <a:spAutoFit/>
+          </a:bodyPr>
+          <a:lstStyle/>
+          <a:p>
+            <a:r>
+              <a:rPr lang="en-US" altLang="ja-JP" dirty="0"/>
+              <a:t>Fig2</a:t>
+            </a:r>
+            <a:r>
+              <a:rPr kumimoji="1" lang="en-US" altLang="ja-JP" dirty="0"/>
+              <a:t>. </a:t>
+            </a:r>
+            <a:r>
+              <a:rPr kumimoji="1" lang="ja-JP" altLang="en-US" dirty="0"/>
+              <a:t>実験の様子．実際は部屋の明かりを消し、暗室状態で行います．</a:t>
+            </a:r>
           </a:p>
         </p:txBody>
       </p:sp>
